--- a/docs/capability-tour.pptx
+++ b/docs/capability-tour.pptx
@@ -3133,7 +3133,7 @@
                 </a:solidFill>
                 <a:latin typeface="PingFang SC"/>
               </a:rPr>
-              <a:t>workloom-ai-acquisition · 能力导览</a:t>
+              <a:t>Growthmatrix·骇客帝国 · 能力导览</a:t>
             </a:r>
           </a:p>
           <a:p>
@@ -3145,7 +3145,7 @@
                 </a:solidFill>
                 <a:latin typeface="PingFang SC"/>
               </a:rPr>
-              <a:t>WorkLoom 获客系统 · 短视频社媒营销 × GEO × 获客五环 × 行业运营（首垂直：酒店）</a:t>
+              <a:t>Growthmatrix·骇客帝国 · 短视频社媒营销 × GEO × 获客五环 × 行业运营（首垂直：酒店）</a:t>
             </a:r>
           </a:p>
           <a:p>

--- a/docs/capability-tour.pptx
+++ b/docs/capability-tour.pptx
@@ -3133,7 +3133,7 @@
                 </a:solidFill>
                 <a:latin typeface="PingFang SC"/>
               </a:rPr>
-              <a:t>Growthmatrix·骇客帝国 · 能力导览</a:t>
+              <a:t>workloom-ai-acquisition · 能力导览</a:t>
             </a:r>
           </a:p>
           <a:p>
@@ -3145,7 +3145,7 @@
                 </a:solidFill>
                 <a:latin typeface="PingFang SC"/>
               </a:rPr>
-              <a:t>Growthmatrix·骇客帝国 · 短视频社媒营销 × GEO × 获客五环 × 行业运营（首垂直：酒店）</a:t>
+              <a:t>WorkLoom 获客系统 · 短视频社媒营销 × GEO × 获客五环 × 行业运营（首垂直：酒店）</a:t>
             </a:r>
           </a:p>
           <a:p>
